--- a/05-truthful-algorithms/slides-advanced.pptx
+++ b/05-truthful-algorithms/slides-advanced.pptx
@@ -130,6 +130,11 @@
       </a:defRPr>
     </a:lvl9pPr>
   </p:defaultTextStyle>
+  <p:extLst>
+    <p:ext uri="{EFAFB233-063F-42B5-8137-9DF3F51BA10A}">
+      <p15:sldGuideLst xmlns:p15="http://schemas.microsoft.com/office/powerpoint/2012/main"/>
+    </p:ext>
+  </p:extLst>
 </p:presentation>
 </file>
 
@@ -3790,7 +3795,7 @@
           <a:p>
             <a:fld id="{B5221831-DA48-4005-A037-9A77D9205C53}" type="datetimeFigureOut">
               <a:rPr lang="he-IL" smtClean="0"/>
-              <a:t>ב'/כסלו/תשפ"ו</a:t>
+              <a:t>ד'/כסלו/תשפ"ו</a:t>
             </a:fld>
             <a:endParaRPr lang="he-IL"/>
           </a:p>
@@ -3989,7 +3994,7 @@
           <a:p>
             <a:fld id="{B5221831-DA48-4005-A037-9A77D9205C53}" type="datetimeFigureOut">
               <a:rPr lang="he-IL" smtClean="0"/>
-              <a:t>ב'/כסלו/תשפ"ו</a:t>
+              <a:t>ד'/כסלו/תשפ"ו</a:t>
             </a:fld>
             <a:endParaRPr lang="he-IL"/>
           </a:p>
@@ -4264,7 +4269,7 @@
           <a:p>
             <a:fld id="{B5221831-DA48-4005-A037-9A77D9205C53}" type="datetimeFigureOut">
               <a:rPr lang="he-IL" smtClean="0"/>
-              <a:t>ב'/כסלו/תשפ"ו</a:t>
+              <a:t>ד'/כסלו/תשפ"ו</a:t>
             </a:fld>
             <a:endParaRPr lang="he-IL"/>
           </a:p>
@@ -4531,7 +4536,7 @@
           <a:p>
             <a:fld id="{B5221831-DA48-4005-A037-9A77D9205C53}" type="datetimeFigureOut">
               <a:rPr lang="he-IL" smtClean="0"/>
-              <a:t>ב'/כסלו/תשפ"ו</a:t>
+              <a:t>ד'/כסלו/תשפ"ו</a:t>
             </a:fld>
             <a:endParaRPr lang="he-IL"/>
           </a:p>
@@ -4945,7 +4950,7 @@
           <a:p>
             <a:fld id="{B5221831-DA48-4005-A037-9A77D9205C53}" type="datetimeFigureOut">
               <a:rPr lang="he-IL" smtClean="0"/>
-              <a:t>ב'/כסלו/תשפ"ו</a:t>
+              <a:t>ד'/כסלו/תשפ"ו</a:t>
             </a:fld>
             <a:endParaRPr lang="he-IL"/>
           </a:p>
@@ -5086,7 +5091,7 @@
           <a:p>
             <a:fld id="{B5221831-DA48-4005-A037-9A77D9205C53}" type="datetimeFigureOut">
               <a:rPr lang="he-IL" smtClean="0"/>
-              <a:t>ב'/כסלו/תשפ"ו</a:t>
+              <a:t>ד'/כסלו/תשפ"ו</a:t>
             </a:fld>
             <a:endParaRPr lang="he-IL"/>
           </a:p>
@@ -5198,7 +5203,7 @@
           <a:p>
             <a:fld id="{B5221831-DA48-4005-A037-9A77D9205C53}" type="datetimeFigureOut">
               <a:rPr lang="he-IL" smtClean="0"/>
-              <a:t>ב'/כסלו/תשפ"ו</a:t>
+              <a:t>ד'/כסלו/תשפ"ו</a:t>
             </a:fld>
             <a:endParaRPr lang="he-IL"/>
           </a:p>
@@ -5510,7 +5515,7 @@
           <a:p>
             <a:fld id="{B5221831-DA48-4005-A037-9A77D9205C53}" type="datetimeFigureOut">
               <a:rPr lang="he-IL" smtClean="0"/>
-              <a:t>ב'/כסלו/תשפ"ו</a:t>
+              <a:t>ד'/כסלו/תשפ"ו</a:t>
             </a:fld>
             <a:endParaRPr lang="he-IL"/>
           </a:p>
@@ -5996,7 +6001,7 @@
           <a:p>
             <a:fld id="{B5221831-DA48-4005-A037-9A77D9205C53}" type="datetimeFigureOut">
               <a:rPr lang="he-IL" smtClean="0"/>
-              <a:t>ב'/כסלו/תשפ"ו</a:t>
+              <a:t>ד'/כסלו/תשפ"ו</a:t>
             </a:fld>
             <a:endParaRPr lang="he-IL"/>
           </a:p>
@@ -6195,7 +6200,7 @@
           <a:p>
             <a:fld id="{B5221831-DA48-4005-A037-9A77D9205C53}" type="datetimeFigureOut">
               <a:rPr lang="he-IL" smtClean="0"/>
-              <a:t>ב'/כסלו/תשפ"ו</a:t>
+              <a:t>ד'/כסלו/תשפ"ו</a:t>
             </a:fld>
             <a:endParaRPr lang="he-IL"/>
           </a:p>
@@ -6404,7 +6409,7 @@
           <a:p>
             <a:fld id="{B5221831-DA48-4005-A037-9A77D9205C53}" type="datetimeFigureOut">
               <a:rPr lang="he-IL" smtClean="0"/>
-              <a:t>ב'/כסלו/תשפ"ו</a:t>
+              <a:t>ד'/כסלו/תשפ"ו</a:t>
             </a:fld>
             <a:endParaRPr lang="he-IL"/>
           </a:p>
@@ -6625,7 +6630,7 @@
           <a:p>
             <a:fld id="{0C552BF9-06F3-48AF-8C2A-30767D92EC92}" type="datetimeFigureOut">
               <a:rPr lang="he-IL" smtClean="0"/>
-              <a:t>ב'/כסלו/תשפ"ו</a:t>
+              <a:t>ד'/כסלו/תשפ"ו</a:t>
             </a:fld>
             <a:endParaRPr lang="he-IL"/>
           </a:p>
@@ -6824,7 +6829,7 @@
           <a:p>
             <a:fld id="{0C552BF9-06F3-48AF-8C2A-30767D92EC92}" type="datetimeFigureOut">
               <a:rPr lang="he-IL" smtClean="0"/>
-              <a:t>ב'/כסלו/תשפ"ו</a:t>
+              <a:t>ד'/כסלו/תשפ"ו</a:t>
             </a:fld>
             <a:endParaRPr lang="he-IL"/>
           </a:p>
@@ -7099,7 +7104,7 @@
           <a:p>
             <a:fld id="{0C552BF9-06F3-48AF-8C2A-30767D92EC92}" type="datetimeFigureOut">
               <a:rPr lang="he-IL" smtClean="0"/>
-              <a:t>ב'/כסלו/תשפ"ו</a:t>
+              <a:t>ד'/כסלו/תשפ"ו</a:t>
             </a:fld>
             <a:endParaRPr lang="he-IL"/>
           </a:p>
@@ -7366,7 +7371,7 @@
           <a:p>
             <a:fld id="{0C552BF9-06F3-48AF-8C2A-30767D92EC92}" type="datetimeFigureOut">
               <a:rPr lang="he-IL" smtClean="0"/>
-              <a:t>ב'/כסלו/תשפ"ו</a:t>
+              <a:t>ד'/כסלו/תשפ"ו</a:t>
             </a:fld>
             <a:endParaRPr lang="he-IL"/>
           </a:p>
@@ -7780,7 +7785,7 @@
           <a:p>
             <a:fld id="{0C552BF9-06F3-48AF-8C2A-30767D92EC92}" type="datetimeFigureOut">
               <a:rPr lang="he-IL" smtClean="0"/>
-              <a:t>ב'/כסלו/תשפ"ו</a:t>
+              <a:t>ד'/כסלו/תשפ"ו</a:t>
             </a:fld>
             <a:endParaRPr lang="he-IL"/>
           </a:p>
@@ -7921,7 +7926,7 @@
           <a:p>
             <a:fld id="{0C552BF9-06F3-48AF-8C2A-30767D92EC92}" type="datetimeFigureOut">
               <a:rPr lang="he-IL" smtClean="0"/>
-              <a:t>ב'/כסלו/תשפ"ו</a:t>
+              <a:t>ד'/כסלו/תשפ"ו</a:t>
             </a:fld>
             <a:endParaRPr lang="he-IL"/>
           </a:p>
@@ -8033,7 +8038,7 @@
           <a:p>
             <a:fld id="{0C552BF9-06F3-48AF-8C2A-30767D92EC92}" type="datetimeFigureOut">
               <a:rPr lang="he-IL" smtClean="0"/>
-              <a:t>ב'/כסלו/תשפ"ו</a:t>
+              <a:t>ד'/כסלו/תשפ"ו</a:t>
             </a:fld>
             <a:endParaRPr lang="he-IL"/>
           </a:p>
@@ -8619,7 +8624,7 @@
           <a:p>
             <a:fld id="{0C552BF9-06F3-48AF-8C2A-30767D92EC92}" type="datetimeFigureOut">
               <a:rPr lang="he-IL" smtClean="0"/>
-              <a:t>ב'/כסלו/תשפ"ו</a:t>
+              <a:t>ד'/כסלו/תשפ"ו</a:t>
             </a:fld>
             <a:endParaRPr lang="he-IL"/>
           </a:p>
@@ -8907,7 +8912,7 @@
           <a:p>
             <a:fld id="{0C552BF9-06F3-48AF-8C2A-30767D92EC92}" type="datetimeFigureOut">
               <a:rPr lang="he-IL" smtClean="0"/>
-              <a:t>ב'/כסלו/תשפ"ו</a:t>
+              <a:t>ד'/כסלו/תשפ"ו</a:t>
             </a:fld>
             <a:endParaRPr lang="he-IL"/>
           </a:p>
@@ -9106,7 +9111,7 @@
           <a:p>
             <a:fld id="{0C552BF9-06F3-48AF-8C2A-30767D92EC92}" type="datetimeFigureOut">
               <a:rPr lang="he-IL" smtClean="0"/>
-              <a:t>ב'/כסלו/תשפ"ו</a:t>
+              <a:t>ד'/כסלו/תשפ"ו</a:t>
             </a:fld>
             <a:endParaRPr lang="he-IL"/>
           </a:p>
@@ -9315,7 +9320,7 @@
           <a:p>
             <a:fld id="{0C552BF9-06F3-48AF-8C2A-30767D92EC92}" type="datetimeFigureOut">
               <a:rPr lang="he-IL" smtClean="0"/>
-              <a:t>ב'/כסלו/תשפ"ו</a:t>
+              <a:t>ד'/כסלו/תשפ"ו</a:t>
             </a:fld>
             <a:endParaRPr lang="he-IL"/>
           </a:p>
@@ -11671,7 +11676,7 @@
           <a:p>
             <a:fld id="{B5221831-DA48-4005-A037-9A77D9205C53}" type="datetimeFigureOut">
               <a:rPr lang="he-IL" smtClean="0"/>
-              <a:t>ב'/כסלו/תשפ"ו</a:t>
+              <a:t>ד'/כסלו/תשפ"ו</a:t>
             </a:fld>
             <a:endParaRPr lang="he-IL"/>
           </a:p>
@@ -12235,7 +12240,7 @@
           <a:p>
             <a:fld id="{0C552BF9-06F3-48AF-8C2A-30767D92EC92}" type="datetimeFigureOut">
               <a:rPr lang="he-IL" smtClean="0"/>
-              <a:t>ב'/כסלו/תשפ"ו</a:t>
+              <a:t>ד'/כסלו/תשפ"ו</a:t>
             </a:fld>
             <a:endParaRPr lang="he-IL"/>
           </a:p>
@@ -20703,7 +20708,19 @@
               <a:rPr lang="en-US" sz="3600">
                 <a:cs typeface="Liberation Sans" pitchFamily="34"/>
               </a:rPr>
-              <a:t>100 ק"ג </a:t>
+              <a:t>100</a:t>
+            </a:r>
+            <a:r>
+              <a:rPr lang="he-IL" sz="3600">
+                <a:cs typeface="Liberation Sans" pitchFamily="34"/>
+              </a:rPr>
+              <a:t> </a:t>
+            </a:r>
+            <a:r>
+              <a:rPr lang="en-US" sz="3600">
+                <a:cs typeface="Liberation Sans" pitchFamily="34"/>
+              </a:rPr>
+              <a:t>ק"ג </a:t>
             </a:r>
             <a:br>
               <a:rPr lang="en-US" sz="3600">
